--- a/7-5-26.pptx
+++ b/7-5-26.pptx
@@ -5901,7 +5901,7 @@
       </p:grpSpPr>
       <p:sp>
         <p:nvSpPr>
-          <p:cNvPr id="104" name="PlaceHolder 4"/>
+          <p:cNvPr id="108" name="PlaceHolder 4"/>
           <p:cNvSpPr/>
           <p:nvPr/>
         </p:nvSpPr>
@@ -5992,7 +5992,7 @@
       </p:grpSpPr>
       <p:sp>
         <p:nvSpPr>
-          <p:cNvPr id="105" name="PlaceHolder 1"/>
+          <p:cNvPr id="109" name="PlaceHolder 1"/>
           <p:cNvSpPr>
             <a:spLocks noGrp="1"/>
           </p:cNvSpPr>
@@ -6051,7 +6051,7 @@
       </p:sp>
       <p:sp>
         <p:nvSpPr>
-          <p:cNvPr id="106" name="Rectangles 4"/>
+          <p:cNvPr id="110" name="Rectangles 4"/>
           <p:cNvSpPr/>
           <p:nvPr/>
         </p:nvSpPr>
@@ -6236,7 +6236,7 @@
       </p:sp>
       <p:pic>
         <p:nvPicPr>
-          <p:cNvPr id="107" name=""/>
+          <p:cNvPr id="111" name=""/>
           <p:cNvPicPr/>
           <p:nvPr/>
         </p:nvPicPr>
@@ -6260,7 +6260,7 @@
       </p:pic>
       <p:pic>
         <p:nvPicPr>
-          <p:cNvPr id="108" name=""/>
+          <p:cNvPr id="112" name=""/>
           <p:cNvPicPr/>
           <p:nvPr/>
         </p:nvPicPr>
@@ -6314,7 +6314,7 @@
       </p:grpSpPr>
       <p:sp>
         <p:nvSpPr>
-          <p:cNvPr id="109" name="PlaceHolder 9"/>
+          <p:cNvPr id="113" name="PlaceHolder 9"/>
           <p:cNvSpPr txBox="1"/>
           <p:nvPr/>
         </p:nvSpPr>
@@ -6368,7 +6368,7 @@
       </p:sp>
       <p:pic>
         <p:nvPicPr>
-          <p:cNvPr id="110" name=""/>
+          <p:cNvPr id="114" name=""/>
           <p:cNvPicPr/>
           <p:nvPr/>
         </p:nvPicPr>
@@ -6422,7 +6422,7 @@
       </p:grpSpPr>
       <p:sp>
         <p:nvSpPr>
-          <p:cNvPr id="111" name="PlaceHolder 7"/>
+          <p:cNvPr id="115" name="PlaceHolder 7"/>
           <p:cNvSpPr/>
           <p:nvPr/>
         </p:nvSpPr>
@@ -6483,7 +6483,7 @@
       </p:sp>
       <p:sp>
         <p:nvSpPr>
-          <p:cNvPr id="112" name=""/>
+          <p:cNvPr id="116" name=""/>
           <p:cNvSpPr txBox="1"/>
           <p:nvPr/>
         </p:nvSpPr>
@@ -6529,7 +6529,7 @@
       </p:sp>
       <p:sp>
         <p:nvSpPr>
-          <p:cNvPr id="113" name=""/>
+          <p:cNvPr id="117" name=""/>
           <p:cNvSpPr txBox="1"/>
           <p:nvPr/>
         </p:nvSpPr>
@@ -6575,7 +6575,7 @@
       </p:sp>
       <p:pic>
         <p:nvPicPr>
-          <p:cNvPr id="114" name=""/>
+          <p:cNvPr id="118" name=""/>
           <p:cNvPicPr/>
           <p:nvPr/>
         </p:nvPicPr>
@@ -6599,7 +6599,7 @@
       </p:pic>
       <p:pic>
         <p:nvPicPr>
-          <p:cNvPr id="115" name=""/>
+          <p:cNvPr id="119" name=""/>
           <p:cNvPicPr/>
           <p:nvPr/>
         </p:nvPicPr>
@@ -6653,7 +6653,7 @@
       </p:grpSpPr>
       <p:sp>
         <p:nvSpPr>
-          <p:cNvPr id="116" name="PlaceHolder 8"/>
+          <p:cNvPr id="120" name="PlaceHolder 8"/>
           <p:cNvSpPr/>
           <p:nvPr/>
         </p:nvSpPr>
@@ -6744,7 +6744,7 @@
       </p:grpSpPr>
       <p:sp>
         <p:nvSpPr>
-          <p:cNvPr id="117" name="PlaceHolder 10"/>
+          <p:cNvPr id="121" name="PlaceHolder 10"/>
           <p:cNvSpPr/>
           <p:nvPr/>
         </p:nvSpPr>
@@ -6835,7 +6835,7 @@
       </p:grpSpPr>
       <p:sp>
         <p:nvSpPr>
-          <p:cNvPr id="118" name="PlaceHolder 1"/>
+          <p:cNvPr id="122" name="PlaceHolder 1"/>
           <p:cNvSpPr>
             <a:spLocks noGrp="1"/>
           </p:cNvSpPr>
@@ -6894,7 +6894,7 @@
       </p:sp>
       <p:sp>
         <p:nvSpPr>
-          <p:cNvPr id="119" name="Rectangles 5"/>
+          <p:cNvPr id="123" name="Rectangles 5"/>
           <p:cNvSpPr/>
           <p:nvPr/>
         </p:nvSpPr>
@@ -7079,7 +7079,7 @@
       </p:sp>
       <p:pic>
         <p:nvPicPr>
-          <p:cNvPr id="120" name=""/>
+          <p:cNvPr id="124" name=""/>
           <p:cNvPicPr/>
           <p:nvPr/>
         </p:nvPicPr>
@@ -7103,7 +7103,7 @@
       </p:pic>
       <p:pic>
         <p:nvPicPr>
-          <p:cNvPr id="121" name=""/>
+          <p:cNvPr id="125" name=""/>
           <p:cNvPicPr/>
           <p:nvPr/>
         </p:nvPicPr>
@@ -7157,7 +7157,7 @@
       </p:grpSpPr>
       <p:sp>
         <p:nvSpPr>
-          <p:cNvPr id="122" name="PlaceHolder 12"/>
+          <p:cNvPr id="126" name="PlaceHolder 12"/>
           <p:cNvSpPr txBox="1"/>
           <p:nvPr/>
         </p:nvSpPr>
@@ -7241,7 +7241,7 @@
       </p:grpSpPr>
       <p:sp>
         <p:nvSpPr>
-          <p:cNvPr id="123" name="PlaceHolder 14"/>
+          <p:cNvPr id="127" name="PlaceHolder 14"/>
           <p:cNvSpPr/>
           <p:nvPr/>
         </p:nvSpPr>
@@ -7302,7 +7302,7 @@
       </p:sp>
       <p:sp>
         <p:nvSpPr>
-          <p:cNvPr id="124" name=""/>
+          <p:cNvPr id="128" name=""/>
           <p:cNvSpPr txBox="1"/>
           <p:nvPr/>
         </p:nvSpPr>
@@ -7348,7 +7348,7 @@
       </p:sp>
       <p:sp>
         <p:nvSpPr>
-          <p:cNvPr id="125" name=""/>
+          <p:cNvPr id="129" name=""/>
           <p:cNvSpPr txBox="1"/>
           <p:nvPr/>
         </p:nvSpPr>
@@ -7394,7 +7394,7 @@
       </p:sp>
       <p:sp>
         <p:nvSpPr>
-          <p:cNvPr id="126" name=""/>
+          <p:cNvPr id="130" name=""/>
           <p:cNvSpPr txBox="1"/>
           <p:nvPr/>
         </p:nvSpPr>
@@ -7440,7 +7440,7 @@
       </p:sp>
       <p:sp>
         <p:nvSpPr>
-          <p:cNvPr id="127" name=""/>
+          <p:cNvPr id="131" name=""/>
           <p:cNvSpPr txBox="1"/>
           <p:nvPr/>
         </p:nvSpPr>
@@ -7486,7 +7486,7 @@
       </p:sp>
       <p:pic>
         <p:nvPicPr>
-          <p:cNvPr id="128" name=""/>
+          <p:cNvPr id="132" name=""/>
           <p:cNvPicPr/>
           <p:nvPr/>
         </p:nvPicPr>
@@ -7510,7 +7510,7 @@
       </p:pic>
       <p:pic>
         <p:nvPicPr>
-          <p:cNvPr id="129" name=""/>
+          <p:cNvPr id="133" name=""/>
           <p:cNvPicPr/>
           <p:nvPr/>
         </p:nvPicPr>
@@ -7534,7 +7534,7 @@
       </p:pic>
       <p:pic>
         <p:nvPicPr>
-          <p:cNvPr id="130" name=""/>
+          <p:cNvPr id="134" name=""/>
           <p:cNvPicPr/>
           <p:nvPr/>
         </p:nvPicPr>
@@ -7558,7 +7558,7 @@
       </p:pic>
       <p:pic>
         <p:nvPicPr>
-          <p:cNvPr id="131" name=""/>
+          <p:cNvPr id="135" name=""/>
           <p:cNvPicPr/>
           <p:nvPr/>
         </p:nvPicPr>
@@ -7612,7 +7612,7 @@
       </p:grpSpPr>
       <p:sp>
         <p:nvSpPr>
-          <p:cNvPr id="132" name="PlaceHolder 15"/>
+          <p:cNvPr id="136" name="PlaceHolder 15"/>
           <p:cNvSpPr/>
           <p:nvPr/>
         </p:nvSpPr>
@@ -8504,7 +8504,7 @@
       </p:grpSpPr>
       <p:sp>
         <p:nvSpPr>
-          <p:cNvPr id="133" name="PlaceHolder 16"/>
+          <p:cNvPr id="137" name="PlaceHolder 16"/>
           <p:cNvSpPr/>
           <p:nvPr/>
         </p:nvSpPr>
@@ -8595,7 +8595,7 @@
       </p:grpSpPr>
       <p:sp>
         <p:nvSpPr>
-          <p:cNvPr id="134" name="PlaceHolder 1"/>
+          <p:cNvPr id="138" name="PlaceHolder 1"/>
           <p:cNvSpPr>
             <a:spLocks noGrp="1"/>
           </p:cNvSpPr>
@@ -8654,7 +8654,7 @@
       </p:sp>
       <p:sp>
         <p:nvSpPr>
-          <p:cNvPr id="135" name="Rectangles 6"/>
+          <p:cNvPr id="139" name="Rectangles 6"/>
           <p:cNvSpPr/>
           <p:nvPr/>
         </p:nvSpPr>
@@ -8839,7 +8839,7 @@
       </p:sp>
       <p:pic>
         <p:nvPicPr>
-          <p:cNvPr id="136" name=""/>
+          <p:cNvPr id="140" name=""/>
           <p:cNvPicPr/>
           <p:nvPr/>
         </p:nvPicPr>
@@ -8863,7 +8863,7 @@
       </p:pic>
       <p:pic>
         <p:nvPicPr>
-          <p:cNvPr id="137" name=""/>
+          <p:cNvPr id="141" name=""/>
           <p:cNvPicPr/>
           <p:nvPr/>
         </p:nvPicPr>
@@ -8917,7 +8917,7 @@
       </p:grpSpPr>
       <p:sp>
         <p:nvSpPr>
-          <p:cNvPr id="138" name="PlaceHolder 17"/>
+          <p:cNvPr id="142" name="PlaceHolder 17"/>
           <p:cNvSpPr txBox="1"/>
           <p:nvPr/>
         </p:nvSpPr>
@@ -8971,7 +8971,7 @@
       </p:sp>
       <p:pic>
         <p:nvPicPr>
-          <p:cNvPr id="139" name=""/>
+          <p:cNvPr id="143" name=""/>
           <p:cNvPicPr/>
           <p:nvPr/>
         </p:nvPicPr>
@@ -8995,7 +8995,7 @@
       </p:pic>
       <p:pic>
         <p:nvPicPr>
-          <p:cNvPr id="140" name=""/>
+          <p:cNvPr id="144" name=""/>
           <p:cNvPicPr/>
           <p:nvPr/>
         </p:nvPicPr>
@@ -9049,7 +9049,7 @@
       </p:grpSpPr>
       <p:sp>
         <p:nvSpPr>
-          <p:cNvPr id="141" name="PlaceHolder 18"/>
+          <p:cNvPr id="145" name="PlaceHolder 18"/>
           <p:cNvSpPr/>
           <p:nvPr/>
         </p:nvSpPr>
@@ -9110,7 +9110,7 @@
       </p:sp>
       <p:sp>
         <p:nvSpPr>
-          <p:cNvPr id="142" name=""/>
+          <p:cNvPr id="146" name=""/>
           <p:cNvSpPr txBox="1"/>
           <p:nvPr/>
         </p:nvSpPr>
@@ -9156,7 +9156,7 @@
       </p:sp>
       <p:sp>
         <p:nvSpPr>
-          <p:cNvPr id="143" name=""/>
+          <p:cNvPr id="147" name=""/>
           <p:cNvSpPr txBox="1"/>
           <p:nvPr/>
         </p:nvSpPr>
@@ -9202,7 +9202,7 @@
       </p:sp>
       <p:sp>
         <p:nvSpPr>
-          <p:cNvPr id="144" name=""/>
+          <p:cNvPr id="148" name=""/>
           <p:cNvSpPr txBox="1"/>
           <p:nvPr/>
         </p:nvSpPr>
@@ -9248,7 +9248,7 @@
       </p:sp>
       <p:pic>
         <p:nvPicPr>
-          <p:cNvPr id="145" name=""/>
+          <p:cNvPr id="149" name=""/>
           <p:cNvPicPr/>
           <p:nvPr/>
         </p:nvPicPr>
@@ -9272,7 +9272,7 @@
       </p:pic>
       <p:pic>
         <p:nvPicPr>
-          <p:cNvPr id="146" name=""/>
+          <p:cNvPr id="150" name=""/>
           <p:cNvPicPr/>
           <p:nvPr/>
         </p:nvPicPr>
@@ -9296,7 +9296,7 @@
       </p:pic>
       <p:pic>
         <p:nvPicPr>
-          <p:cNvPr id="147" name=""/>
+          <p:cNvPr id="151" name=""/>
           <p:cNvPicPr/>
           <p:nvPr/>
         </p:nvPicPr>
@@ -9350,7 +9350,7 @@
       </p:grpSpPr>
       <p:sp>
         <p:nvSpPr>
-          <p:cNvPr id="148" name="PlaceHolder 19"/>
+          <p:cNvPr id="152" name="PlaceHolder 19"/>
           <p:cNvSpPr/>
           <p:nvPr/>
         </p:nvSpPr>
@@ -9441,7 +9441,7 @@
       </p:grpSpPr>
       <p:sp>
         <p:nvSpPr>
-          <p:cNvPr id="149" name="PlaceHolder 20"/>
+          <p:cNvPr id="153" name="PlaceHolder 20"/>
           <p:cNvSpPr/>
           <p:nvPr/>
         </p:nvSpPr>
@@ -9532,7 +9532,7 @@
       </p:grpSpPr>
       <p:sp>
         <p:nvSpPr>
-          <p:cNvPr id="150" name="PlaceHolder 1"/>
+          <p:cNvPr id="154" name="PlaceHolder 1"/>
           <p:cNvSpPr>
             <a:spLocks noGrp="1"/>
           </p:cNvSpPr>
@@ -9591,7 +9591,7 @@
       </p:sp>
       <p:sp>
         <p:nvSpPr>
-          <p:cNvPr id="151" name="Rectangles 7"/>
+          <p:cNvPr id="155" name="Rectangles 7"/>
           <p:cNvSpPr/>
           <p:nvPr/>
         </p:nvSpPr>
@@ -9806,7 +9806,7 @@
       </p:grpSpPr>
       <p:sp>
         <p:nvSpPr>
-          <p:cNvPr id="152" name="PlaceHolder 24"/>
+          <p:cNvPr id="156" name="PlaceHolder 24"/>
           <p:cNvSpPr txBox="1"/>
           <p:nvPr/>
         </p:nvSpPr>
@@ -9860,7 +9860,7 @@
       </p:sp>
       <p:pic>
         <p:nvPicPr>
-          <p:cNvPr id="153" name=""/>
+          <p:cNvPr id="157" name=""/>
           <p:cNvPicPr/>
           <p:nvPr/>
         </p:nvPicPr>
@@ -9884,7 +9884,7 @@
       </p:pic>
       <p:pic>
         <p:nvPicPr>
-          <p:cNvPr id="154" name=""/>
+          <p:cNvPr id="158" name=""/>
           <p:cNvPicPr/>
           <p:nvPr/>
         </p:nvPicPr>
@@ -9938,7 +9938,7 @@
       </p:grpSpPr>
       <p:sp>
         <p:nvSpPr>
-          <p:cNvPr id="155" name="PlaceHolder 26"/>
+          <p:cNvPr id="159" name="PlaceHolder 26"/>
           <p:cNvSpPr/>
           <p:nvPr/>
         </p:nvSpPr>
@@ -9999,7 +9999,7 @@
       </p:sp>
       <p:sp>
         <p:nvSpPr>
-          <p:cNvPr id="156" name=""/>
+          <p:cNvPr id="160" name=""/>
           <p:cNvSpPr txBox="1"/>
           <p:nvPr/>
         </p:nvSpPr>
@@ -10045,7 +10045,7 @@
       </p:sp>
       <p:sp>
         <p:nvSpPr>
-          <p:cNvPr id="157" name=""/>
+          <p:cNvPr id="161" name=""/>
           <p:cNvSpPr txBox="1"/>
           <p:nvPr/>
         </p:nvSpPr>
@@ -10091,7 +10091,7 @@
       </p:sp>
       <p:sp>
         <p:nvSpPr>
-          <p:cNvPr id="158" name=""/>
+          <p:cNvPr id="162" name=""/>
           <p:cNvSpPr txBox="1"/>
           <p:nvPr/>
         </p:nvSpPr>
@@ -10137,7 +10137,7 @@
       </p:sp>
       <p:sp>
         <p:nvSpPr>
-          <p:cNvPr id="159" name=""/>
+          <p:cNvPr id="163" name=""/>
           <p:cNvSpPr txBox="1"/>
           <p:nvPr/>
         </p:nvSpPr>
@@ -10213,7 +10213,7 @@
       </p:grpSpPr>
       <p:sp>
         <p:nvSpPr>
-          <p:cNvPr id="160" name="PlaceHolder 28"/>
+          <p:cNvPr id="164" name="PlaceHolder 28"/>
           <p:cNvSpPr/>
           <p:nvPr/>
         </p:nvSpPr>
@@ -10447,7 +10447,7 @@
                 <a:latin typeface="Arial"/>
                 <a:ea typeface="SimSun"/>
               </a:rPr>
-              <a:t>CELL SIGNAL = LYSOSOME SIGNAL PER CELL + REST CELL SIGNAL</a:t>
+              <a:t>TOTAL SIGNAL = LYSOSOME SIGNAL PER CELL + REST CELL SIGNAL</a:t>
             </a:r>
             <a:endParaRPr lang="en-US" sz="1600" b="0" u="none" strike="noStrike">
               <a:solidFill>
@@ -11968,7 +11968,7 @@
       </p:grpSpPr>
       <p:sp>
         <p:nvSpPr>
-          <p:cNvPr id="161" name="PlaceHolder 29"/>
+          <p:cNvPr id="165" name="PlaceHolder 29"/>
           <p:cNvSpPr/>
           <p:nvPr/>
         </p:nvSpPr>
@@ -12059,7 +12059,7 @@
       </p:grpSpPr>
       <p:sp>
         <p:nvSpPr>
-          <p:cNvPr id="162" name="PlaceHolder 1"/>
+          <p:cNvPr id="166" name="PlaceHolder 1"/>
           <p:cNvSpPr>
             <a:spLocks noGrp="1"/>
           </p:cNvSpPr>
@@ -12118,7 +12118,7 @@
       </p:sp>
       <p:sp>
         <p:nvSpPr>
-          <p:cNvPr id="163" name="Rectangles 8"/>
+          <p:cNvPr id="167" name="Rectangles 8"/>
           <p:cNvSpPr/>
           <p:nvPr/>
         </p:nvSpPr>
@@ -12333,7 +12333,7 @@
       </p:grpSpPr>
       <p:sp>
         <p:nvSpPr>
-          <p:cNvPr id="164" name="PlaceHolder 31"/>
+          <p:cNvPr id="168" name="PlaceHolder 31"/>
           <p:cNvSpPr txBox="1"/>
           <p:nvPr/>
         </p:nvSpPr>
@@ -12417,7 +12417,7 @@
       </p:grpSpPr>
       <p:sp>
         <p:nvSpPr>
-          <p:cNvPr id="165" name="PlaceHolder 32"/>
+          <p:cNvPr id="169" name="PlaceHolder 32"/>
           <p:cNvSpPr/>
           <p:nvPr/>
         </p:nvSpPr>
@@ -12478,7 +12478,7 @@
       </p:sp>
       <p:sp>
         <p:nvSpPr>
-          <p:cNvPr id="166" name=""/>
+          <p:cNvPr id="170" name=""/>
           <p:cNvSpPr txBox="1"/>
           <p:nvPr/>
         </p:nvSpPr>
@@ -12524,7 +12524,7 @@
       </p:sp>
       <p:sp>
         <p:nvSpPr>
-          <p:cNvPr id="167" name=""/>
+          <p:cNvPr id="171" name=""/>
           <p:cNvSpPr txBox="1"/>
           <p:nvPr/>
         </p:nvSpPr>
@@ -12570,7 +12570,7 @@
       </p:sp>
       <p:sp>
         <p:nvSpPr>
-          <p:cNvPr id="168" name=""/>
+          <p:cNvPr id="172" name=""/>
           <p:cNvSpPr txBox="1"/>
           <p:nvPr/>
         </p:nvSpPr>
@@ -12646,7 +12646,7 @@
       </p:grpSpPr>
       <p:sp>
         <p:nvSpPr>
-          <p:cNvPr id="169" name="PlaceHolder 33"/>
+          <p:cNvPr id="173" name="PlaceHolder 33"/>
           <p:cNvSpPr/>
           <p:nvPr/>
         </p:nvSpPr>
@@ -12737,7 +12737,7 @@
       </p:grpSpPr>
       <p:sp>
         <p:nvSpPr>
-          <p:cNvPr id="170" name="PlaceHolder 34"/>
+          <p:cNvPr id="174" name="PlaceHolder 34"/>
           <p:cNvSpPr/>
           <p:nvPr/>
         </p:nvSpPr>
@@ -12828,7 +12828,7 @@
       </p:grpSpPr>
       <p:sp>
         <p:nvSpPr>
-          <p:cNvPr id="171" name="PlaceHolder 1"/>
+          <p:cNvPr id="175" name="PlaceHolder 1"/>
           <p:cNvSpPr>
             <a:spLocks noGrp="1"/>
           </p:cNvSpPr>
@@ -12887,7 +12887,7 @@
       </p:sp>
       <p:sp>
         <p:nvSpPr>
-          <p:cNvPr id="172" name="Rectangles 9"/>
+          <p:cNvPr id="176" name="Rectangles 9"/>
           <p:cNvSpPr/>
           <p:nvPr/>
         </p:nvSpPr>
@@ -13072,7 +13072,7 @@
       </p:sp>
       <p:pic>
         <p:nvPicPr>
-          <p:cNvPr id="173" name=""/>
+          <p:cNvPr id="177" name=""/>
           <p:cNvPicPr/>
           <p:nvPr/>
         </p:nvPicPr>
@@ -13096,7 +13096,7 @@
       </p:pic>
       <p:pic>
         <p:nvPicPr>
-          <p:cNvPr id="174" name=""/>
+          <p:cNvPr id="178" name=""/>
           <p:cNvPicPr/>
           <p:nvPr/>
         </p:nvPicPr>
@@ -13150,7 +13150,7 @@
       </p:grpSpPr>
       <p:sp>
         <p:nvSpPr>
-          <p:cNvPr id="175" name="PlaceHolder 36"/>
+          <p:cNvPr id="179" name="PlaceHolder 36"/>
           <p:cNvSpPr txBox="1"/>
           <p:nvPr/>
         </p:nvSpPr>
@@ -13204,7 +13204,7 @@
       </p:sp>
       <p:pic>
         <p:nvPicPr>
-          <p:cNvPr id="176" name=""/>
+          <p:cNvPr id="180" name=""/>
           <p:cNvPicPr/>
           <p:nvPr/>
         </p:nvPicPr>
@@ -13258,7 +13258,7 @@
       </p:grpSpPr>
       <p:sp>
         <p:nvSpPr>
-          <p:cNvPr id="177" name="PlaceHolder 37"/>
+          <p:cNvPr id="181" name="PlaceHolder 37"/>
           <p:cNvSpPr/>
           <p:nvPr/>
         </p:nvSpPr>
@@ -13319,7 +13319,7 @@
       </p:sp>
       <p:pic>
         <p:nvPicPr>
-          <p:cNvPr id="178" name=""/>
+          <p:cNvPr id="182" name=""/>
           <p:cNvPicPr/>
           <p:nvPr/>
         </p:nvPicPr>
@@ -13343,7 +13343,7 @@
       </p:pic>
       <p:pic>
         <p:nvPicPr>
-          <p:cNvPr id="179" name=""/>
+          <p:cNvPr id="183" name=""/>
           <p:cNvPicPr/>
           <p:nvPr/>
         </p:nvPicPr>
@@ -13397,7 +13397,7 @@
       </p:grpSpPr>
       <p:sp>
         <p:nvSpPr>
-          <p:cNvPr id="180" name="PlaceHolder 38"/>
+          <p:cNvPr id="184" name="PlaceHolder 38"/>
           <p:cNvSpPr/>
           <p:nvPr/>
         </p:nvSpPr>
@@ -15355,6 +15355,102 @@
           </a:p>
         </p:txBody>
       </p:sp>
+      <p:pic>
+        <p:nvPicPr>
+          <p:cNvPr id="104" name=""/>
+          <p:cNvPicPr/>
+          <p:nvPr/>
+        </p:nvPicPr>
+        <p:blipFill>
+          <a:blip r:embed="rId1"/>
+          <a:stretch/>
+        </p:blipFill>
+        <p:spPr>
+          <a:xfrm>
+            <a:off x="180360" y="952920"/>
+            <a:ext cx="11132640" cy="2476080"/>
+          </a:xfrm>
+          <a:prstGeom prst="rect">
+            <a:avLst/>
+          </a:prstGeom>
+          <a:noFill/>
+          <a:ln w="0">
+            <a:noFill/>
+          </a:ln>
+        </p:spPr>
+      </p:pic>
+      <p:pic>
+        <p:nvPicPr>
+          <p:cNvPr id="105" name=""/>
+          <p:cNvPicPr/>
+          <p:nvPr/>
+        </p:nvPicPr>
+        <p:blipFill>
+          <a:blip r:embed="rId2"/>
+          <a:stretch/>
+        </p:blipFill>
+        <p:spPr>
+          <a:xfrm>
+            <a:off x="180360" y="3467520"/>
+            <a:ext cx="10298880" cy="1790280"/>
+          </a:xfrm>
+          <a:prstGeom prst="rect">
+            <a:avLst/>
+          </a:prstGeom>
+          <a:noFill/>
+          <a:ln w="0">
+            <a:noFill/>
+          </a:ln>
+        </p:spPr>
+      </p:pic>
+      <p:pic>
+        <p:nvPicPr>
+          <p:cNvPr id="106" name=""/>
+          <p:cNvPicPr/>
+          <p:nvPr/>
+        </p:nvPicPr>
+        <p:blipFill>
+          <a:blip r:embed="rId3"/>
+          <a:stretch/>
+        </p:blipFill>
+        <p:spPr>
+          <a:xfrm>
+            <a:off x="228600" y="5334480"/>
+            <a:ext cx="4231440" cy="1294920"/>
+          </a:xfrm>
+          <a:prstGeom prst="rect">
+            <a:avLst/>
+          </a:prstGeom>
+          <a:noFill/>
+          <a:ln w="0">
+            <a:noFill/>
+          </a:ln>
+        </p:spPr>
+      </p:pic>
+      <p:pic>
+        <p:nvPicPr>
+          <p:cNvPr id="107" name=""/>
+          <p:cNvPicPr/>
+          <p:nvPr/>
+        </p:nvPicPr>
+        <p:blipFill>
+          <a:blip r:embed="rId4"/>
+          <a:stretch/>
+        </p:blipFill>
+        <p:spPr>
+          <a:xfrm>
+            <a:off x="5162760" y="5486400"/>
+            <a:ext cx="3323880" cy="1085400"/>
+          </a:xfrm>
+          <a:prstGeom prst="rect">
+            <a:avLst/>
+          </a:prstGeom>
+          <a:noFill/>
+          <a:ln w="0">
+            <a:noFill/>
+          </a:ln>
+        </p:spPr>
+      </p:pic>
     </p:spTree>
   </p:cSld>
   <mc:AlternateContent>

--- a/7-5-26.pptx
+++ b/7-5-26.pptx
@@ -6378,8 +6378,32 @@
         </p:blipFill>
         <p:spPr>
           <a:xfrm>
-            <a:off x="71280" y="1371600"/>
-            <a:ext cx="5415120" cy="4572000"/>
+            <a:off x="126000" y="1042560"/>
+            <a:ext cx="5478840" cy="4672440"/>
+          </a:xfrm>
+          <a:prstGeom prst="rect">
+            <a:avLst/>
+          </a:prstGeom>
+          <a:noFill/>
+          <a:ln w="0">
+            <a:noFill/>
+          </a:ln>
+        </p:spPr>
+      </p:pic>
+      <p:pic>
+        <p:nvPicPr>
+          <p:cNvPr id="115" name=""/>
+          <p:cNvPicPr/>
+          <p:nvPr/>
+        </p:nvPicPr>
+        <p:blipFill>
+          <a:blip r:embed="rId2"/>
+          <a:stretch/>
+        </p:blipFill>
+        <p:spPr>
+          <a:xfrm>
+            <a:off x="5762160" y="1042560"/>
+            <a:ext cx="5478840" cy="4672440"/>
           </a:xfrm>
           <a:prstGeom prst="rect">
             <a:avLst/>
@@ -6422,7 +6446,7 @@
       </p:grpSpPr>
       <p:sp>
         <p:nvSpPr>
-          <p:cNvPr id="115" name="PlaceHolder 7"/>
+          <p:cNvPr id="116" name="PlaceHolder 7"/>
           <p:cNvSpPr/>
           <p:nvPr/>
         </p:nvSpPr>
@@ -6483,7 +6507,7 @@
       </p:sp>
       <p:sp>
         <p:nvSpPr>
-          <p:cNvPr id="116" name=""/>
+          <p:cNvPr id="117" name=""/>
           <p:cNvSpPr txBox="1"/>
           <p:nvPr/>
         </p:nvSpPr>
@@ -6529,7 +6553,7 @@
       </p:sp>
       <p:sp>
         <p:nvSpPr>
-          <p:cNvPr id="117" name=""/>
+          <p:cNvPr id="118" name=""/>
           <p:cNvSpPr txBox="1"/>
           <p:nvPr/>
         </p:nvSpPr>
@@ -6575,7 +6599,7 @@
       </p:sp>
       <p:pic>
         <p:nvPicPr>
-          <p:cNvPr id="118" name=""/>
+          <p:cNvPr id="119" name=""/>
           <p:cNvPicPr/>
           <p:nvPr/>
         </p:nvPicPr>
@@ -6599,7 +6623,7 @@
       </p:pic>
       <p:pic>
         <p:nvPicPr>
-          <p:cNvPr id="119" name=""/>
+          <p:cNvPr id="120" name=""/>
           <p:cNvPicPr/>
           <p:nvPr/>
         </p:nvPicPr>
@@ -6653,7 +6677,7 @@
       </p:grpSpPr>
       <p:sp>
         <p:nvSpPr>
-          <p:cNvPr id="120" name="PlaceHolder 8"/>
+          <p:cNvPr id="121" name="PlaceHolder 8"/>
           <p:cNvSpPr/>
           <p:nvPr/>
         </p:nvSpPr>
@@ -6712,6 +6736,102 @@
           </a:p>
         </p:txBody>
       </p:sp>
+      <p:pic>
+        <p:nvPicPr>
+          <p:cNvPr id="122" name=""/>
+          <p:cNvPicPr/>
+          <p:nvPr/>
+        </p:nvPicPr>
+        <p:blipFill>
+          <a:blip r:embed="rId1"/>
+          <a:stretch/>
+        </p:blipFill>
+        <p:spPr>
+          <a:xfrm>
+            <a:off x="457200" y="1143000"/>
+            <a:ext cx="10744200" cy="919800"/>
+          </a:xfrm>
+          <a:prstGeom prst="rect">
+            <a:avLst/>
+          </a:prstGeom>
+          <a:noFill/>
+          <a:ln w="0">
+            <a:noFill/>
+          </a:ln>
+        </p:spPr>
+      </p:pic>
+      <p:pic>
+        <p:nvPicPr>
+          <p:cNvPr id="123" name=""/>
+          <p:cNvPicPr/>
+          <p:nvPr/>
+        </p:nvPicPr>
+        <p:blipFill>
+          <a:blip r:embed="rId2"/>
+          <a:stretch/>
+        </p:blipFill>
+        <p:spPr>
+          <a:xfrm>
+            <a:off x="457200" y="2286000"/>
+            <a:ext cx="11346840" cy="914400"/>
+          </a:xfrm>
+          <a:prstGeom prst="rect">
+            <a:avLst/>
+          </a:prstGeom>
+          <a:noFill/>
+          <a:ln w="0">
+            <a:noFill/>
+          </a:ln>
+        </p:spPr>
+      </p:pic>
+      <p:pic>
+        <p:nvPicPr>
+          <p:cNvPr id="124" name=""/>
+          <p:cNvPicPr/>
+          <p:nvPr/>
+        </p:nvPicPr>
+        <p:blipFill>
+          <a:blip r:embed="rId3"/>
+          <a:stretch/>
+        </p:blipFill>
+        <p:spPr>
+          <a:xfrm>
+            <a:off x="914400" y="3724560"/>
+            <a:ext cx="4861080" cy="1533240"/>
+          </a:xfrm>
+          <a:prstGeom prst="rect">
+            <a:avLst/>
+          </a:prstGeom>
+          <a:noFill/>
+          <a:ln w="0">
+            <a:noFill/>
+          </a:ln>
+        </p:spPr>
+      </p:pic>
+      <p:pic>
+        <p:nvPicPr>
+          <p:cNvPr id="125" name=""/>
+          <p:cNvPicPr/>
+          <p:nvPr/>
+        </p:nvPicPr>
+        <p:blipFill>
+          <a:blip r:embed="rId4"/>
+          <a:stretch/>
+        </p:blipFill>
+        <p:spPr>
+          <a:xfrm>
+            <a:off x="6374880" y="3886200"/>
+            <a:ext cx="4369320" cy="1371600"/>
+          </a:xfrm>
+          <a:prstGeom prst="rect">
+            <a:avLst/>
+          </a:prstGeom>
+          <a:noFill/>
+          <a:ln w="0">
+            <a:noFill/>
+          </a:ln>
+        </p:spPr>
+      </p:pic>
     </p:spTree>
   </p:cSld>
   <mc:AlternateContent>
@@ -6744,7 +6864,7 @@
       </p:grpSpPr>
       <p:sp>
         <p:nvSpPr>
-          <p:cNvPr id="121" name="PlaceHolder 10"/>
+          <p:cNvPr id="126" name="PlaceHolder 10"/>
           <p:cNvSpPr/>
           <p:nvPr/>
         </p:nvSpPr>
@@ -6835,7 +6955,7 @@
       </p:grpSpPr>
       <p:sp>
         <p:nvSpPr>
-          <p:cNvPr id="122" name="PlaceHolder 1"/>
+          <p:cNvPr id="127" name="PlaceHolder 1"/>
           <p:cNvSpPr>
             <a:spLocks noGrp="1"/>
           </p:cNvSpPr>
@@ -6894,7 +7014,7 @@
       </p:sp>
       <p:sp>
         <p:nvSpPr>
-          <p:cNvPr id="123" name="Rectangles 5"/>
+          <p:cNvPr id="128" name="Rectangles 5"/>
           <p:cNvSpPr/>
           <p:nvPr/>
         </p:nvSpPr>
@@ -7079,7 +7199,7 @@
       </p:sp>
       <p:pic>
         <p:nvPicPr>
-          <p:cNvPr id="124" name=""/>
+          <p:cNvPr id="129" name=""/>
           <p:cNvPicPr/>
           <p:nvPr/>
         </p:nvPicPr>
@@ -7103,7 +7223,7 @@
       </p:pic>
       <p:pic>
         <p:nvPicPr>
-          <p:cNvPr id="125" name=""/>
+          <p:cNvPr id="130" name=""/>
           <p:cNvPicPr/>
           <p:nvPr/>
         </p:nvPicPr>
@@ -7157,7 +7277,7 @@
       </p:grpSpPr>
       <p:sp>
         <p:nvSpPr>
-          <p:cNvPr id="126" name="PlaceHolder 12"/>
+          <p:cNvPr id="131" name="PlaceHolder 12"/>
           <p:cNvSpPr txBox="1"/>
           <p:nvPr/>
         </p:nvSpPr>
@@ -7241,7 +7361,7 @@
       </p:grpSpPr>
       <p:sp>
         <p:nvSpPr>
-          <p:cNvPr id="127" name="PlaceHolder 14"/>
+          <p:cNvPr id="132" name="PlaceHolder 14"/>
           <p:cNvSpPr/>
           <p:nvPr/>
         </p:nvSpPr>
@@ -7302,7 +7422,7 @@
       </p:sp>
       <p:sp>
         <p:nvSpPr>
-          <p:cNvPr id="128" name=""/>
+          <p:cNvPr id="133" name=""/>
           <p:cNvSpPr txBox="1"/>
           <p:nvPr/>
         </p:nvSpPr>
@@ -7348,7 +7468,7 @@
       </p:sp>
       <p:sp>
         <p:nvSpPr>
-          <p:cNvPr id="129" name=""/>
+          <p:cNvPr id="134" name=""/>
           <p:cNvSpPr txBox="1"/>
           <p:nvPr/>
         </p:nvSpPr>
@@ -7394,7 +7514,7 @@
       </p:sp>
       <p:sp>
         <p:nvSpPr>
-          <p:cNvPr id="130" name=""/>
+          <p:cNvPr id="135" name=""/>
           <p:cNvSpPr txBox="1"/>
           <p:nvPr/>
         </p:nvSpPr>
@@ -7440,7 +7560,7 @@
       </p:sp>
       <p:sp>
         <p:nvSpPr>
-          <p:cNvPr id="131" name=""/>
+          <p:cNvPr id="136" name=""/>
           <p:cNvSpPr txBox="1"/>
           <p:nvPr/>
         </p:nvSpPr>
@@ -7486,7 +7606,7 @@
       </p:sp>
       <p:pic>
         <p:nvPicPr>
-          <p:cNvPr id="132" name=""/>
+          <p:cNvPr id="137" name=""/>
           <p:cNvPicPr/>
           <p:nvPr/>
         </p:nvPicPr>
@@ -7510,7 +7630,7 @@
       </p:pic>
       <p:pic>
         <p:nvPicPr>
-          <p:cNvPr id="133" name=""/>
+          <p:cNvPr id="138" name=""/>
           <p:cNvPicPr/>
           <p:nvPr/>
         </p:nvPicPr>
@@ -7534,7 +7654,7 @@
       </p:pic>
       <p:pic>
         <p:nvPicPr>
-          <p:cNvPr id="134" name=""/>
+          <p:cNvPr id="139" name=""/>
           <p:cNvPicPr/>
           <p:nvPr/>
         </p:nvPicPr>
@@ -7558,7 +7678,7 @@
       </p:pic>
       <p:pic>
         <p:nvPicPr>
-          <p:cNvPr id="135" name=""/>
+          <p:cNvPr id="140" name=""/>
           <p:cNvPicPr/>
           <p:nvPr/>
         </p:nvPicPr>
@@ -7612,7 +7732,7 @@
       </p:grpSpPr>
       <p:sp>
         <p:nvSpPr>
-          <p:cNvPr id="136" name="PlaceHolder 15"/>
+          <p:cNvPr id="141" name="PlaceHolder 15"/>
           <p:cNvSpPr/>
           <p:nvPr/>
         </p:nvSpPr>
@@ -7671,6 +7791,102 @@
           </a:p>
         </p:txBody>
       </p:sp>
+      <p:pic>
+        <p:nvPicPr>
+          <p:cNvPr id="142" name=""/>
+          <p:cNvPicPr/>
+          <p:nvPr/>
+        </p:nvPicPr>
+        <p:blipFill>
+          <a:blip r:embed="rId1"/>
+          <a:stretch/>
+        </p:blipFill>
+        <p:spPr>
+          <a:xfrm>
+            <a:off x="228600" y="1010160"/>
+            <a:ext cx="11270160" cy="1733040"/>
+          </a:xfrm>
+          <a:prstGeom prst="rect">
+            <a:avLst/>
+          </a:prstGeom>
+          <a:noFill/>
+          <a:ln w="0">
+            <a:noFill/>
+          </a:ln>
+        </p:spPr>
+      </p:pic>
+      <p:pic>
+        <p:nvPicPr>
+          <p:cNvPr id="143" name=""/>
+          <p:cNvPicPr/>
+          <p:nvPr/>
+        </p:nvPicPr>
+        <p:blipFill>
+          <a:blip r:embed="rId2"/>
+          <a:stretch/>
+        </p:blipFill>
+        <p:spPr>
+          <a:xfrm>
+            <a:off x="133200" y="3092040"/>
+            <a:ext cx="11754000" cy="1251720"/>
+          </a:xfrm>
+          <a:prstGeom prst="rect">
+            <a:avLst/>
+          </a:prstGeom>
+          <a:noFill/>
+          <a:ln w="0">
+            <a:noFill/>
+          </a:ln>
+        </p:spPr>
+      </p:pic>
+      <p:pic>
+        <p:nvPicPr>
+          <p:cNvPr id="144" name=""/>
+          <p:cNvPicPr/>
+          <p:nvPr/>
+        </p:nvPicPr>
+        <p:blipFill>
+          <a:blip r:embed="rId3"/>
+          <a:stretch/>
+        </p:blipFill>
+        <p:spPr>
+          <a:xfrm>
+            <a:off x="543600" y="4800600"/>
+            <a:ext cx="4582440" cy="1371600"/>
+          </a:xfrm>
+          <a:prstGeom prst="rect">
+            <a:avLst/>
+          </a:prstGeom>
+          <a:noFill/>
+          <a:ln w="0">
+            <a:noFill/>
+          </a:ln>
+        </p:spPr>
+      </p:pic>
+      <p:pic>
+        <p:nvPicPr>
+          <p:cNvPr id="145" name=""/>
+          <p:cNvPicPr/>
+          <p:nvPr/>
+        </p:nvPicPr>
+        <p:blipFill>
+          <a:blip r:embed="rId4"/>
+          <a:stretch/>
+        </p:blipFill>
+        <p:spPr>
+          <a:xfrm>
+            <a:off x="6025320" y="4800600"/>
+            <a:ext cx="4262040" cy="1371600"/>
+          </a:xfrm>
+          <a:prstGeom prst="rect">
+            <a:avLst/>
+          </a:prstGeom>
+          <a:noFill/>
+          <a:ln w="0">
+            <a:noFill/>
+          </a:ln>
+        </p:spPr>
+      </p:pic>
     </p:spTree>
   </p:cSld>
   <mc:AlternateContent>
@@ -8504,7 +8720,7 @@
       </p:grpSpPr>
       <p:sp>
         <p:nvSpPr>
-          <p:cNvPr id="137" name="PlaceHolder 16"/>
+          <p:cNvPr id="146" name="PlaceHolder 16"/>
           <p:cNvSpPr/>
           <p:nvPr/>
         </p:nvSpPr>
@@ -8595,7 +8811,7 @@
       </p:grpSpPr>
       <p:sp>
         <p:nvSpPr>
-          <p:cNvPr id="138" name="PlaceHolder 1"/>
+          <p:cNvPr id="147" name="PlaceHolder 1"/>
           <p:cNvSpPr>
             <a:spLocks noGrp="1"/>
           </p:cNvSpPr>
@@ -8654,7 +8870,7 @@
       </p:sp>
       <p:sp>
         <p:nvSpPr>
-          <p:cNvPr id="139" name="Rectangles 6"/>
+          <p:cNvPr id="148" name="Rectangles 6"/>
           <p:cNvSpPr/>
           <p:nvPr/>
         </p:nvSpPr>
@@ -8839,7 +9055,7 @@
       </p:sp>
       <p:pic>
         <p:nvPicPr>
-          <p:cNvPr id="140" name=""/>
+          <p:cNvPr id="149" name=""/>
           <p:cNvPicPr/>
           <p:nvPr/>
         </p:nvPicPr>
@@ -8863,7 +9079,7 @@
       </p:pic>
       <p:pic>
         <p:nvPicPr>
-          <p:cNvPr id="141" name=""/>
+          <p:cNvPr id="150" name=""/>
           <p:cNvPicPr/>
           <p:nvPr/>
         </p:nvPicPr>
@@ -8917,7 +9133,7 @@
       </p:grpSpPr>
       <p:sp>
         <p:nvSpPr>
-          <p:cNvPr id="142" name="PlaceHolder 17"/>
+          <p:cNvPr id="151" name="PlaceHolder 17"/>
           <p:cNvSpPr txBox="1"/>
           <p:nvPr/>
         </p:nvSpPr>
@@ -8971,7 +9187,7 @@
       </p:sp>
       <p:pic>
         <p:nvPicPr>
-          <p:cNvPr id="143" name=""/>
+          <p:cNvPr id="152" name=""/>
           <p:cNvPicPr/>
           <p:nvPr/>
         </p:nvPicPr>
@@ -8995,7 +9211,7 @@
       </p:pic>
       <p:pic>
         <p:nvPicPr>
-          <p:cNvPr id="144" name=""/>
+          <p:cNvPr id="153" name=""/>
           <p:cNvPicPr/>
           <p:nvPr/>
         </p:nvPicPr>
@@ -9049,7 +9265,7 @@
       </p:grpSpPr>
       <p:sp>
         <p:nvSpPr>
-          <p:cNvPr id="145" name="PlaceHolder 18"/>
+          <p:cNvPr id="154" name="PlaceHolder 18"/>
           <p:cNvSpPr/>
           <p:nvPr/>
         </p:nvSpPr>
@@ -9110,7 +9326,7 @@
       </p:sp>
       <p:sp>
         <p:nvSpPr>
-          <p:cNvPr id="146" name=""/>
+          <p:cNvPr id="155" name=""/>
           <p:cNvSpPr txBox="1"/>
           <p:nvPr/>
         </p:nvSpPr>
@@ -9156,7 +9372,7 @@
       </p:sp>
       <p:sp>
         <p:nvSpPr>
-          <p:cNvPr id="147" name=""/>
+          <p:cNvPr id="156" name=""/>
           <p:cNvSpPr txBox="1"/>
           <p:nvPr/>
         </p:nvSpPr>
@@ -9202,7 +9418,7 @@
       </p:sp>
       <p:sp>
         <p:nvSpPr>
-          <p:cNvPr id="148" name=""/>
+          <p:cNvPr id="157" name=""/>
           <p:cNvSpPr txBox="1"/>
           <p:nvPr/>
         </p:nvSpPr>
@@ -9248,7 +9464,7 @@
       </p:sp>
       <p:pic>
         <p:nvPicPr>
-          <p:cNvPr id="149" name=""/>
+          <p:cNvPr id="158" name=""/>
           <p:cNvPicPr/>
           <p:nvPr/>
         </p:nvPicPr>
@@ -9272,7 +9488,7 @@
       </p:pic>
       <p:pic>
         <p:nvPicPr>
-          <p:cNvPr id="150" name=""/>
+          <p:cNvPr id="159" name=""/>
           <p:cNvPicPr/>
           <p:nvPr/>
         </p:nvPicPr>
@@ -9296,7 +9512,7 @@
       </p:pic>
       <p:pic>
         <p:nvPicPr>
-          <p:cNvPr id="151" name=""/>
+          <p:cNvPr id="160" name=""/>
           <p:cNvPicPr/>
           <p:nvPr/>
         </p:nvPicPr>
@@ -9350,7 +9566,7 @@
       </p:grpSpPr>
       <p:sp>
         <p:nvSpPr>
-          <p:cNvPr id="152" name="PlaceHolder 19"/>
+          <p:cNvPr id="161" name="PlaceHolder 19"/>
           <p:cNvSpPr/>
           <p:nvPr/>
         </p:nvSpPr>
@@ -9409,6 +9625,102 @@
           </a:p>
         </p:txBody>
       </p:sp>
+      <p:pic>
+        <p:nvPicPr>
+          <p:cNvPr id="162" name=""/>
+          <p:cNvPicPr/>
+          <p:nvPr/>
+        </p:nvPicPr>
+        <p:blipFill>
+          <a:blip r:embed="rId1"/>
+          <a:stretch/>
+        </p:blipFill>
+        <p:spPr>
+          <a:xfrm>
+            <a:off x="457200" y="962280"/>
+            <a:ext cx="11422800" cy="1552320"/>
+          </a:xfrm>
+          <a:prstGeom prst="rect">
+            <a:avLst/>
+          </a:prstGeom>
+          <a:noFill/>
+          <a:ln w="0">
+            <a:noFill/>
+          </a:ln>
+        </p:spPr>
+      </p:pic>
+      <p:pic>
+        <p:nvPicPr>
+          <p:cNvPr id="163" name=""/>
+          <p:cNvPicPr/>
+          <p:nvPr/>
+        </p:nvPicPr>
+        <p:blipFill>
+          <a:blip r:embed="rId2"/>
+          <a:stretch/>
+        </p:blipFill>
+        <p:spPr>
+          <a:xfrm>
+            <a:off x="299520" y="2662200"/>
+            <a:ext cx="11359080" cy="1224000"/>
+          </a:xfrm>
+          <a:prstGeom prst="rect">
+            <a:avLst/>
+          </a:prstGeom>
+          <a:noFill/>
+          <a:ln w="0">
+            <a:noFill/>
+          </a:ln>
+        </p:spPr>
+      </p:pic>
+      <p:pic>
+        <p:nvPicPr>
+          <p:cNvPr id="164" name=""/>
+          <p:cNvPicPr/>
+          <p:nvPr/>
+        </p:nvPicPr>
+        <p:blipFill>
+          <a:blip r:embed="rId3"/>
+          <a:stretch/>
+        </p:blipFill>
+        <p:spPr>
+          <a:xfrm>
+            <a:off x="914400" y="4343400"/>
+            <a:ext cx="4487040" cy="1371600"/>
+          </a:xfrm>
+          <a:prstGeom prst="rect">
+            <a:avLst/>
+          </a:prstGeom>
+          <a:noFill/>
+          <a:ln w="0">
+            <a:noFill/>
+          </a:ln>
+        </p:spPr>
+      </p:pic>
+      <p:pic>
+        <p:nvPicPr>
+          <p:cNvPr id="165" name=""/>
+          <p:cNvPicPr/>
+          <p:nvPr/>
+        </p:nvPicPr>
+        <p:blipFill>
+          <a:blip r:embed="rId4"/>
+          <a:stretch/>
+        </p:blipFill>
+        <p:spPr>
+          <a:xfrm>
+            <a:off x="5715000" y="4458240"/>
+            <a:ext cx="4213080" cy="1256760"/>
+          </a:xfrm>
+          <a:prstGeom prst="rect">
+            <a:avLst/>
+          </a:prstGeom>
+          <a:noFill/>
+          <a:ln w="0">
+            <a:noFill/>
+          </a:ln>
+        </p:spPr>
+      </p:pic>
     </p:spTree>
   </p:cSld>
   <mc:AlternateContent>
@@ -9441,7 +9753,7 @@
       </p:grpSpPr>
       <p:sp>
         <p:nvSpPr>
-          <p:cNvPr id="153" name="PlaceHolder 20"/>
+          <p:cNvPr id="166" name="PlaceHolder 20"/>
           <p:cNvSpPr/>
           <p:nvPr/>
         </p:nvSpPr>
@@ -9532,7 +9844,7 @@
       </p:grpSpPr>
       <p:sp>
         <p:nvSpPr>
-          <p:cNvPr id="154" name="PlaceHolder 1"/>
+          <p:cNvPr id="167" name="PlaceHolder 1"/>
           <p:cNvSpPr>
             <a:spLocks noGrp="1"/>
           </p:cNvSpPr>
@@ -9591,7 +9903,7 @@
       </p:sp>
       <p:sp>
         <p:nvSpPr>
-          <p:cNvPr id="155" name="Rectangles 7"/>
+          <p:cNvPr id="168" name="Rectangles 7"/>
           <p:cNvSpPr/>
           <p:nvPr/>
         </p:nvSpPr>
@@ -9638,7 +9950,7 @@
                 <a:latin typeface="Arial"/>
                 <a:ea typeface="SimSun"/>
               </a:rPr>
-              <a:t>Erosion = 7</a:t>
+              <a:t>Erosion = 8</a:t>
             </a:r>
             <a:endParaRPr lang="en-US" sz="1400" b="0" u="none" strike="noStrike">
               <a:solidFill>
@@ -9665,7 +9977,7 @@
                 <a:latin typeface="Arial"/>
                 <a:ea typeface="SimSun"/>
               </a:rPr>
-              <a:t>Thresholding = 0.02</a:t>
+              <a:t>Thresholding = 0.015</a:t>
             </a:r>
             <a:endParaRPr lang="en-US" sz="1400" b="0" u="none" strike="noStrike">
               <a:solidFill>
@@ -9774,6 +10086,54 @@
           </a:p>
         </p:txBody>
       </p:sp>
+      <p:pic>
+        <p:nvPicPr>
+          <p:cNvPr id="169" name=""/>
+          <p:cNvPicPr/>
+          <p:nvPr/>
+        </p:nvPicPr>
+        <p:blipFill>
+          <a:blip r:embed="rId1"/>
+          <a:stretch/>
+        </p:blipFill>
+        <p:spPr>
+          <a:xfrm>
+            <a:off x="2057400" y="1547640"/>
+            <a:ext cx="5004360" cy="4267800"/>
+          </a:xfrm>
+          <a:prstGeom prst="rect">
+            <a:avLst/>
+          </a:prstGeom>
+          <a:noFill/>
+          <a:ln w="0">
+            <a:noFill/>
+          </a:ln>
+        </p:spPr>
+      </p:pic>
+      <p:pic>
+        <p:nvPicPr>
+          <p:cNvPr id="170" name=""/>
+          <p:cNvPicPr/>
+          <p:nvPr/>
+        </p:nvPicPr>
+        <p:blipFill>
+          <a:blip r:embed="rId2"/>
+          <a:stretch/>
+        </p:blipFill>
+        <p:spPr>
+          <a:xfrm>
+            <a:off x="7173360" y="1499760"/>
+            <a:ext cx="4942440" cy="4215240"/>
+          </a:xfrm>
+          <a:prstGeom prst="rect">
+            <a:avLst/>
+          </a:prstGeom>
+          <a:noFill/>
+          <a:ln w="0">
+            <a:noFill/>
+          </a:ln>
+        </p:spPr>
+      </p:pic>
     </p:spTree>
   </p:cSld>
   <mc:AlternateContent>
@@ -9806,7 +10166,7 @@
       </p:grpSpPr>
       <p:sp>
         <p:nvSpPr>
-          <p:cNvPr id="156" name="PlaceHolder 24"/>
+          <p:cNvPr id="171" name="PlaceHolder 24"/>
           <p:cNvSpPr txBox="1"/>
           <p:nvPr/>
         </p:nvSpPr>
@@ -9860,7 +10220,7 @@
       </p:sp>
       <p:pic>
         <p:nvPicPr>
-          <p:cNvPr id="157" name=""/>
+          <p:cNvPr id="172" name=""/>
           <p:cNvPicPr/>
           <p:nvPr/>
         </p:nvPicPr>
@@ -9884,7 +10244,7 @@
       </p:pic>
       <p:pic>
         <p:nvPicPr>
-          <p:cNvPr id="158" name=""/>
+          <p:cNvPr id="173" name=""/>
           <p:cNvPicPr/>
           <p:nvPr/>
         </p:nvPicPr>
@@ -9938,7 +10298,7 @@
       </p:grpSpPr>
       <p:sp>
         <p:nvSpPr>
-          <p:cNvPr id="159" name="PlaceHolder 26"/>
+          <p:cNvPr id="174" name="PlaceHolder 26"/>
           <p:cNvSpPr/>
           <p:nvPr/>
         </p:nvSpPr>
@@ -9999,7 +10359,7 @@
       </p:sp>
       <p:sp>
         <p:nvSpPr>
-          <p:cNvPr id="160" name=""/>
+          <p:cNvPr id="175" name=""/>
           <p:cNvSpPr txBox="1"/>
           <p:nvPr/>
         </p:nvSpPr>
@@ -10045,7 +10405,7 @@
       </p:sp>
       <p:sp>
         <p:nvSpPr>
-          <p:cNvPr id="161" name=""/>
+          <p:cNvPr id="176" name=""/>
           <p:cNvSpPr txBox="1"/>
           <p:nvPr/>
         </p:nvSpPr>
@@ -10091,7 +10451,7 @@
       </p:sp>
       <p:sp>
         <p:nvSpPr>
-          <p:cNvPr id="162" name=""/>
+          <p:cNvPr id="177" name=""/>
           <p:cNvSpPr txBox="1"/>
           <p:nvPr/>
         </p:nvSpPr>
@@ -10137,7 +10497,7 @@
       </p:sp>
       <p:sp>
         <p:nvSpPr>
-          <p:cNvPr id="163" name=""/>
+          <p:cNvPr id="178" name=""/>
           <p:cNvSpPr txBox="1"/>
           <p:nvPr/>
         </p:nvSpPr>
@@ -10181,6 +10541,102 @@
           </a:p>
         </p:txBody>
       </p:sp>
+      <p:pic>
+        <p:nvPicPr>
+          <p:cNvPr id="179" name=""/>
+          <p:cNvPicPr/>
+          <p:nvPr/>
+        </p:nvPicPr>
+        <p:blipFill>
+          <a:blip r:embed="rId1"/>
+          <a:stretch/>
+        </p:blipFill>
+        <p:spPr>
+          <a:xfrm>
+            <a:off x="2033640" y="809640"/>
+            <a:ext cx="3071520" cy="2619360"/>
+          </a:xfrm>
+          <a:prstGeom prst="rect">
+            <a:avLst/>
+          </a:prstGeom>
+          <a:noFill/>
+          <a:ln w="0">
+            <a:noFill/>
+          </a:ln>
+        </p:spPr>
+      </p:pic>
+      <p:pic>
+        <p:nvPicPr>
+          <p:cNvPr id="180" name=""/>
+          <p:cNvPicPr/>
+          <p:nvPr/>
+        </p:nvPicPr>
+        <p:blipFill>
+          <a:blip r:embed="rId2"/>
+          <a:stretch/>
+        </p:blipFill>
+        <p:spPr>
+          <a:xfrm>
+            <a:off x="7356240" y="457200"/>
+            <a:ext cx="3752640" cy="3200400"/>
+          </a:xfrm>
+          <a:prstGeom prst="rect">
+            <a:avLst/>
+          </a:prstGeom>
+          <a:noFill/>
+          <a:ln w="0">
+            <a:noFill/>
+          </a:ln>
+        </p:spPr>
+      </p:pic>
+      <p:pic>
+        <p:nvPicPr>
+          <p:cNvPr id="181" name=""/>
+          <p:cNvPicPr/>
+          <p:nvPr/>
+        </p:nvPicPr>
+        <p:blipFill>
+          <a:blip r:embed="rId3"/>
+          <a:stretch/>
+        </p:blipFill>
+        <p:spPr>
+          <a:xfrm>
+            <a:off x="1828800" y="3785760"/>
+            <a:ext cx="3334320" cy="2843640"/>
+          </a:xfrm>
+          <a:prstGeom prst="rect">
+            <a:avLst/>
+          </a:prstGeom>
+          <a:noFill/>
+          <a:ln w="0">
+            <a:noFill/>
+          </a:ln>
+        </p:spPr>
+      </p:pic>
+      <p:pic>
+        <p:nvPicPr>
+          <p:cNvPr id="182" name=""/>
+          <p:cNvPicPr/>
+          <p:nvPr/>
+        </p:nvPicPr>
+        <p:blipFill>
+          <a:blip r:embed="rId4"/>
+          <a:stretch/>
+        </p:blipFill>
+        <p:spPr>
+          <a:xfrm>
+            <a:off x="7250400" y="3683520"/>
+            <a:ext cx="3722400" cy="3174480"/>
+          </a:xfrm>
+          <a:prstGeom prst="rect">
+            <a:avLst/>
+          </a:prstGeom>
+          <a:noFill/>
+          <a:ln w="0">
+            <a:noFill/>
+          </a:ln>
+        </p:spPr>
+      </p:pic>
     </p:spTree>
   </p:cSld>
   <mc:AlternateContent>
@@ -10213,7 +10669,7 @@
       </p:grpSpPr>
       <p:sp>
         <p:nvSpPr>
-          <p:cNvPr id="164" name="PlaceHolder 28"/>
+          <p:cNvPr id="183" name="PlaceHolder 28"/>
           <p:cNvSpPr/>
           <p:nvPr/>
         </p:nvSpPr>
@@ -11968,7 +12424,7 @@
       </p:grpSpPr>
       <p:sp>
         <p:nvSpPr>
-          <p:cNvPr id="165" name="PlaceHolder 29"/>
+          <p:cNvPr id="184" name="PlaceHolder 29"/>
           <p:cNvSpPr/>
           <p:nvPr/>
         </p:nvSpPr>
@@ -12059,7 +12515,7 @@
       </p:grpSpPr>
       <p:sp>
         <p:nvSpPr>
-          <p:cNvPr id="166" name="PlaceHolder 1"/>
+          <p:cNvPr id="185" name="PlaceHolder 1"/>
           <p:cNvSpPr>
             <a:spLocks noGrp="1"/>
           </p:cNvSpPr>
@@ -12118,7 +12574,7 @@
       </p:sp>
       <p:sp>
         <p:nvSpPr>
-          <p:cNvPr id="167" name="Rectangles 8"/>
+          <p:cNvPr id="186" name="Rectangles 8"/>
           <p:cNvSpPr/>
           <p:nvPr/>
         </p:nvSpPr>
@@ -12333,7 +12789,7 @@
       </p:grpSpPr>
       <p:sp>
         <p:nvSpPr>
-          <p:cNvPr id="168" name="PlaceHolder 31"/>
+          <p:cNvPr id="187" name="PlaceHolder 31"/>
           <p:cNvSpPr txBox="1"/>
           <p:nvPr/>
         </p:nvSpPr>
@@ -12417,7 +12873,7 @@
       </p:grpSpPr>
       <p:sp>
         <p:nvSpPr>
-          <p:cNvPr id="169" name="PlaceHolder 32"/>
+          <p:cNvPr id="188" name="PlaceHolder 32"/>
           <p:cNvSpPr/>
           <p:nvPr/>
         </p:nvSpPr>
@@ -12478,7 +12934,7 @@
       </p:sp>
       <p:sp>
         <p:nvSpPr>
-          <p:cNvPr id="170" name=""/>
+          <p:cNvPr id="189" name=""/>
           <p:cNvSpPr txBox="1"/>
           <p:nvPr/>
         </p:nvSpPr>
@@ -12524,7 +12980,7 @@
       </p:sp>
       <p:sp>
         <p:nvSpPr>
-          <p:cNvPr id="171" name=""/>
+          <p:cNvPr id="190" name=""/>
           <p:cNvSpPr txBox="1"/>
           <p:nvPr/>
         </p:nvSpPr>
@@ -12570,7 +13026,7 @@
       </p:sp>
       <p:sp>
         <p:nvSpPr>
-          <p:cNvPr id="172" name=""/>
+          <p:cNvPr id="191" name=""/>
           <p:cNvSpPr txBox="1"/>
           <p:nvPr/>
         </p:nvSpPr>
@@ -12646,7 +13102,7 @@
       </p:grpSpPr>
       <p:sp>
         <p:nvSpPr>
-          <p:cNvPr id="173" name="PlaceHolder 33"/>
+          <p:cNvPr id="192" name="PlaceHolder 33"/>
           <p:cNvSpPr/>
           <p:nvPr/>
         </p:nvSpPr>
@@ -12737,7 +13193,7 @@
       </p:grpSpPr>
       <p:sp>
         <p:nvSpPr>
-          <p:cNvPr id="174" name="PlaceHolder 34"/>
+          <p:cNvPr id="193" name="PlaceHolder 34"/>
           <p:cNvSpPr/>
           <p:nvPr/>
         </p:nvSpPr>
@@ -12828,7 +13284,7 @@
       </p:grpSpPr>
       <p:sp>
         <p:nvSpPr>
-          <p:cNvPr id="175" name="PlaceHolder 1"/>
+          <p:cNvPr id="194" name="PlaceHolder 1"/>
           <p:cNvSpPr>
             <a:spLocks noGrp="1"/>
           </p:cNvSpPr>
@@ -12887,7 +13343,7 @@
       </p:sp>
       <p:sp>
         <p:nvSpPr>
-          <p:cNvPr id="176" name="Rectangles 9"/>
+          <p:cNvPr id="195" name="Rectangles 9"/>
           <p:cNvSpPr/>
           <p:nvPr/>
         </p:nvSpPr>
@@ -13072,7 +13528,7 @@
       </p:sp>
       <p:pic>
         <p:nvPicPr>
-          <p:cNvPr id="177" name=""/>
+          <p:cNvPr id="196" name=""/>
           <p:cNvPicPr/>
           <p:nvPr/>
         </p:nvPicPr>
@@ -13096,7 +13552,7 @@
       </p:pic>
       <p:pic>
         <p:nvPicPr>
-          <p:cNvPr id="178" name=""/>
+          <p:cNvPr id="197" name=""/>
           <p:cNvPicPr/>
           <p:nvPr/>
         </p:nvPicPr>
@@ -13150,7 +13606,7 @@
       </p:grpSpPr>
       <p:sp>
         <p:nvSpPr>
-          <p:cNvPr id="179" name="PlaceHolder 36"/>
+          <p:cNvPr id="198" name="PlaceHolder 36"/>
           <p:cNvSpPr txBox="1"/>
           <p:nvPr/>
         </p:nvSpPr>
@@ -13204,7 +13660,7 @@
       </p:sp>
       <p:pic>
         <p:nvPicPr>
-          <p:cNvPr id="180" name=""/>
+          <p:cNvPr id="199" name=""/>
           <p:cNvPicPr/>
           <p:nvPr/>
         </p:nvPicPr>
@@ -13258,7 +13714,7 @@
       </p:grpSpPr>
       <p:sp>
         <p:nvSpPr>
-          <p:cNvPr id="181" name="PlaceHolder 37"/>
+          <p:cNvPr id="200" name="PlaceHolder 37"/>
           <p:cNvSpPr/>
           <p:nvPr/>
         </p:nvSpPr>
@@ -13319,7 +13775,7 @@
       </p:sp>
       <p:pic>
         <p:nvPicPr>
-          <p:cNvPr id="182" name=""/>
+          <p:cNvPr id="201" name=""/>
           <p:cNvPicPr/>
           <p:nvPr/>
         </p:nvPicPr>
@@ -13343,7 +13799,7 @@
       </p:pic>
       <p:pic>
         <p:nvPicPr>
-          <p:cNvPr id="183" name=""/>
+          <p:cNvPr id="202" name=""/>
           <p:cNvPicPr/>
           <p:nvPr/>
         </p:nvPicPr>
@@ -13397,7 +13853,7 @@
       </p:grpSpPr>
       <p:sp>
         <p:nvSpPr>
-          <p:cNvPr id="184" name="PlaceHolder 38"/>
+          <p:cNvPr id="203" name="PlaceHolder 38"/>
           <p:cNvSpPr/>
           <p:nvPr/>
         </p:nvSpPr>
